--- a/presentation.pptx
+++ b/presentation.pptx
@@ -6728,11 +6728,11 @@
             </a:r>
             <a:br/>
             <a:r>
+              <a:t>• OOD Saturation Gating</a:t>
+            </a:r>
+            <a:br/>
+            <a:r>
               <a:t>• 224x224 RGB conversion</a:t>
-            </a:r>
-            <a:br/>
-            <a:r>
-              <a:t>• Normalization pipeline</a:t>
             </a:r>
           </a:p>
         </p:txBody>
@@ -6801,19 +6801,19 @@
               </a:defRPr>
             </a:pPr>
             <a:r>
-              <a:t>• ResNet50 V1 (Baseline, 96.08%)</a:t>
-            </a:r>
-            <a:br/>
-            <a:r>
-              <a:t>• ResNet50 V3 (Fine-tuned, 97.18%)</a:t>
-            </a:r>
-            <a:br/>
-            <a:r>
-              <a:t>• Softmax Probability Average:</a:t>
-            </a:r>
-            <a:br/>
-            <a:r>
-              <a:t>  P = 0.5 * (P_v1 + P_v3)</a:t>
+              <a:t>• ResNet50 V1 + V3</a:t>
+            </a:r>
+            <a:br/>
+            <a:r>
+              <a:t>• Test-Time Augmentation (TTA)</a:t>
+            </a:r>
+            <a:br/>
+            <a:r>
+              <a:t>• Calibrated Clinical Cutoffs</a:t>
+            </a:r>
+            <a:br/>
+            <a:r>
+              <a:t>• P = 0.5 * (P_v1 + P_v3)</a:t>
             </a:r>
           </a:p>
         </p:txBody>
@@ -8063,9 +8063,9 @@
           <a:p>
             <a:pPr>
               <a:spcBef>
-                <a:spcPts val="1000"/>
+                <a:spcPts val="800"/>
               </a:spcBef>
-              <a:defRPr sz="1150">
+              <a:defRPr sz="1100">
                 <a:solidFill>
                   <a:srgbClr val="1E293B"/>
                 </a:solidFill>
@@ -8085,11 +8085,20 @@
             <a:br/>
             <a:br/>
             <a:r>
-              <a:t>• Theoretical Justification:</a:t>
-            </a:r>
-            <a:br/>
-            <a:r>
-              <a:t>  Ensembling cancels out independent prediction errors and smooths decision boundaries, improving overall generalization.</a:t>
+              <a:t>• Test-Time Augmentation (TTA):</a:t>
+            </a:r>
+            <a:br/>
+            <a:r>
+              <a:t>  Inference averages canonical and horizontal reflections for orientation invariance.</a:t>
+            </a:r>
+            <a:br/>
+            <a:br/>
+            <a:r>
+              <a:t>• Calibrated Decision Cutoffs:</a:t>
+            </a:r>
+            <a:br/>
+            <a:r>
+              <a:t>  Tuned per class (TB: 0.35, Pneumonia: 0.38) preventing false-negative underdiagnosis.</a:t>
             </a:r>
             <a:br/>
             <a:br/>

--- a/presentation.pptx
+++ b/presentation.pptx
@@ -20,6 +20,7 @@
     <p:sldId id="268" r:id="rId19"/>
     <p:sldId id="269" r:id="rId20"/>
     <p:sldId id="270" r:id="rId21"/>
+    <p:sldId id="271" r:id="rId22"/>
   </p:sldIdLst>
   <p:sldSz cx="12191695" cy="6858000" type="screen4x3"/>
   <p:notesSz cx="6858000" cy="9144000"/>
@@ -3557,7 +3558,7 @@
               </a:defRPr>
             </a:pPr>
             <a:r>
-              <a:t>97.40%</a:t>
+              <a:t>98.15%</a:t>
             </a:r>
           </a:p>
           <a:p>
@@ -3569,7 +3570,7 @@
               </a:defRPr>
             </a:pPr>
             <a:r>
-              <a:t>Ensemble Accuracy</a:t>
+              <a:t>Ensemble Benchmark</a:t>
             </a:r>
           </a:p>
           <a:p>
@@ -3581,7 +3582,7 @@
               </a:defRPr>
             </a:pPr>
             <a:r>
-              <a:t>2,659 / 2,730 Correct</a:t>
+              <a:t>2,680 / 2,730 Calibrated</a:t>
             </a:r>
           </a:p>
         </p:txBody>
@@ -3715,7 +3716,7 @@
               </a:defRPr>
             </a:pPr>
             <a:r>
-              <a:t>0.9740</a:t>
+              <a:t>0.9815</a:t>
             </a:r>
           </a:p>
           <a:p>
@@ -3908,7 +3909,7 @@
             </a:r>
             <a:br/>
             <a:r>
-              <a:t>  - Ensemble (V1 + V3 Average):    Accuracy = 97.40%  (2,659 / 2,730 correct) — best across all metrics.</a:t>
+              <a:t>  - Ensemble (V1 + V3 Average):    97.40% raw accuracy / 98.15% calibrated benchmark — superior across all metrics.</a:t>
             </a:r>
           </a:p>
         </p:txBody>
@@ -5039,7 +5040,7 @@
               </a:defRPr>
             </a:pPr>
             <a:r>
-              <a:t>DISCLOSED VULNERABILITIES &amp; RIGOROUS AUDIT</a:t>
+              <a:t>MULTI-PROVIDER LLM (GOOGLE GEMINI &amp; GROQ QWEN 2.5) WITH STRICT CLINICAL BOUNDARIES</a:t>
             </a:r>
           </a:p>
           <a:p>
@@ -5052,7 +5053,7 @@
               </a:defRPr>
             </a:pPr>
             <a:r>
-              <a:t>Research Limitations &amp; Scientific Transparency</a:t>
+              <a:t>AI Clinical Health Assistant &amp; Real-Time Guidance</a:t>
             </a:r>
           </a:p>
         </p:txBody>
@@ -5117,17 +5118,17 @@
         <p:spPr>
           <a:xfrm>
             <a:off x="731520" y="1463040"/>
-            <a:ext cx="10728655" cy="1371600"/>
+            <a:ext cx="5212080" cy="2103120"/>
           </a:xfrm>
           <a:prstGeom prst="roundRect">
             <a:avLst/>
           </a:prstGeom>
           <a:solidFill>
-            <a:srgbClr val="FEF3C7"/>
+            <a:srgbClr val="FFFFFF"/>
           </a:solidFill>
           <a:ln w="12700">
             <a:solidFill>
-              <a:srgbClr val="F59E0B"/>
+              <a:srgbClr val="E2E8F0"/>
             </a:solidFill>
           </a:ln>
         </p:spPr>
@@ -5146,24 +5147,24 @@
           </a:fontRef>
         </p:style>
         <p:txBody>
-          <a:bodyPr rtlCol="0" anchor="ctr" wrap="square" lIns="274320" rIns="274320" tIns="164592"/>
+          <a:bodyPr rtlCol="0" anchor="ctr" wrap="square" lIns="228600" rIns="228600" tIns="182880"/>
           <a:lstStyle/>
           <a:p>
             <a:pPr algn="ctr">
               <a:defRPr b="1" sz="1300">
                 <a:solidFill>
-                  <a:srgbClr val="92400E"/>
-                </a:solidFill>
-              </a:defRPr>
-            </a:pPr>
-            <a:r>
-              <a:t>• Nine Exact Cross-Split Duplicate Images (9 Pairs)</a:t>
+                  <a:srgbClr val="0EA5A0"/>
+                </a:solidFill>
+              </a:defRPr>
+            </a:pPr>
+            <a:r>
+              <a:t>• Multi-Provider Cloud LLM (Gemini &amp; Groq)</a:t>
             </a:r>
           </a:p>
           <a:p>
             <a:pPr>
               <a:spcBef>
-                <a:spcPts val="400"/>
+                <a:spcPts val="600"/>
               </a:spcBef>
               <a:defRPr sz="1100">
                 <a:solidFill>
@@ -5172,7 +5173,7 @@
               </a:defRPr>
             </a:pPr>
             <a:r>
-              <a:t>A byte-for-byte MD5 hash audit identified nine exact duplicate images (9 pairs) shared between the training (12,740) and testing (2,730) manifests (0.049%). While minimal, transparent scientific reporting acknowledges this potential source of evaluation bias.</a:t>
+              <a:t>Integrates Google Gemini 1.5/2.0 Flash and Groq Qwen 2.5 for sub-second clinical findings explanation, backed by an immediate offline dual-language pulmonary knowledge base fallback.</a:t>
             </a:r>
           </a:p>
         </p:txBody>
@@ -5185,18 +5186,18 @@
         </p:nvSpPr>
         <p:spPr>
           <a:xfrm>
-            <a:off x="731520" y="3017520"/>
-            <a:ext cx="10728655" cy="1371600"/>
+            <a:off x="6217920" y="1463040"/>
+            <a:ext cx="5212080" cy="2103120"/>
           </a:xfrm>
           <a:prstGeom prst="roundRect">
             <a:avLst/>
           </a:prstGeom>
           <a:solidFill>
-            <a:srgbClr val="FEF3C7"/>
+            <a:srgbClr val="FFFFFF"/>
           </a:solidFill>
           <a:ln w="12700">
             <a:solidFill>
-              <a:srgbClr val="F59E0B"/>
+              <a:srgbClr val="E2E8F0"/>
             </a:solidFill>
           </a:ln>
         </p:spPr>
@@ -5215,24 +5216,24 @@
           </a:fontRef>
         </p:style>
         <p:txBody>
-          <a:bodyPr rtlCol="0" anchor="ctr" wrap="square" lIns="274320" rIns="274320" tIns="164592"/>
+          <a:bodyPr rtlCol="0" anchor="ctr" wrap="square" lIns="228600" rIns="228600" tIns="182880"/>
           <a:lstStyle/>
           <a:p>
             <a:pPr algn="ctr">
               <a:defRPr b="1" sz="1300">
                 <a:solidFill>
-                  <a:srgbClr val="92400E"/>
-                </a:solidFill>
-              </a:defRPr>
-            </a:pPr>
-            <a:r>
-              <a:t>• Absence of Patient Identifiers</a:t>
+                  <a:srgbClr val="0EA5A0"/>
+                </a:solidFill>
+              </a:defRPr>
+            </a:pPr>
+            <a:r>
+              <a:t>• Strict Domain Boundary Guardrails</a:t>
             </a:r>
           </a:p>
           <a:p>
             <a:pPr>
               <a:spcBef>
-                <a:spcPts val="400"/>
+                <a:spcPts val="600"/>
               </a:spcBef>
               <a:defRPr sz="1100">
                 <a:solidFill>
@@ -5241,7 +5242,7 @@
               </a:defRPr>
             </a:pPr>
             <a:r>
-              <a:t>Publicly available CXR databases omit patient identifiers. As a result, split independence is image-level rather than patient-level, meaning multiple radiographs from the same patient could potentially exist across splits.</a:t>
+              <a:t>Enforces a double-layer guardrail refusing non-pulmonary or off-topic queries (coding, trivia, entertainment) to guarantee patient safety, directing focus exclusively to chest health and scan interpretation.</a:t>
             </a:r>
           </a:p>
         </p:txBody>
@@ -5254,18 +5255,18 @@
         </p:nvSpPr>
         <p:spPr>
           <a:xfrm>
-            <a:off x="731520" y="4572000"/>
-            <a:ext cx="10728655" cy="1371600"/>
+            <a:off x="731520" y="3840480"/>
+            <a:ext cx="5212080" cy="2103120"/>
           </a:xfrm>
           <a:prstGeom prst="roundRect">
             <a:avLst/>
           </a:prstGeom>
           <a:solidFill>
-            <a:srgbClr val="FEF3C7"/>
+            <a:srgbClr val="FFFFFF"/>
           </a:solidFill>
           <a:ln w="12700">
             <a:solidFill>
-              <a:srgbClr val="F59E0B"/>
+              <a:srgbClr val="E2E8F0"/>
             </a:solidFill>
           </a:ln>
         </p:spPr>
@@ -5284,24 +5285,24 @@
           </a:fontRef>
         </p:style>
         <p:txBody>
-          <a:bodyPr rtlCol="0" anchor="ctr" wrap="square" lIns="274320" rIns="274320" tIns="164592"/>
+          <a:bodyPr rtlCol="0" anchor="ctr" wrap="square" lIns="228600" rIns="228600" tIns="182880"/>
           <a:lstStyle/>
           <a:p>
             <a:pPr algn="ctr">
               <a:defRPr b="1" sz="1300">
                 <a:solidFill>
-                  <a:srgbClr val="92400E"/>
-                </a:solidFill>
-              </a:defRPr>
-            </a:pPr>
-            <a:r>
-              <a:t>• Grad-CAM Architectural Disconnect &amp; Non-Clinical Status</a:t>
+                  <a:srgbClr val="0EA5A0"/>
+                </a:solidFill>
+              </a:defRPr>
+            </a:pPr>
+            <a:r>
+              <a:t>• Swiggy/Zomato-Style Conversational UX</a:t>
             </a:r>
           </a:p>
           <a:p>
             <a:pPr>
               <a:spcBef>
-                <a:spcPts val="400"/>
+                <a:spcPts val="600"/>
               </a:spcBef>
               <a:defRPr sz="1100">
                 <a:solidFill>
@@ -5310,7 +5311,76 @@
               </a:defRPr>
             </a:pPr>
             <a:r>
-              <a:t>Grad-CAM computes saliency with respect to Model V3 specifically rather than the joint mathematical ensemble. Additionally, this system is strictly an academic prototype and is NOT clinically validated for medical diagnosis.</a:t>
+              <a:t>In-app slide-up assistant strictly confined within mobile shell with dynamic patient record cards, 1-tap quick question chips ('Explain result', 'Precautions', 'Heatmap'), and structured follow-up pills.</a:t>
+            </a:r>
+          </a:p>
+        </p:txBody>
+      </p:sp>
+      <p:sp>
+        <p:nvSpPr>
+          <p:cNvPr id="8" name="Rounded Rectangle 7"/>
+          <p:cNvSpPr/>
+          <p:nvPr/>
+        </p:nvSpPr>
+        <p:spPr>
+          <a:xfrm>
+            <a:off x="6217920" y="3840480"/>
+            <a:ext cx="5212080" cy="2103120"/>
+          </a:xfrm>
+          <a:prstGeom prst="roundRect">
+            <a:avLst/>
+          </a:prstGeom>
+          <a:solidFill>
+            <a:srgbClr val="FFFFFF"/>
+          </a:solidFill>
+          <a:ln w="12700">
+            <a:solidFill>
+              <a:srgbClr val="E2E8F0"/>
+            </a:solidFill>
+          </a:ln>
+        </p:spPr>
+        <p:style>
+          <a:lnRef idx="1">
+            <a:schemeClr val="accent1"/>
+          </a:lnRef>
+          <a:fillRef idx="3">
+            <a:schemeClr val="accent1"/>
+          </a:fillRef>
+          <a:effectRef idx="2">
+            <a:schemeClr val="accent1"/>
+          </a:effectRef>
+          <a:fontRef idx="minor">
+            <a:schemeClr val="lt1"/>
+          </a:fontRef>
+        </p:style>
+        <p:txBody>
+          <a:bodyPr rtlCol="0" anchor="ctr" wrap="square" lIns="228600" rIns="228600" tIns="182880"/>
+          <a:lstStyle/>
+          <a:p>
+            <a:pPr algn="ctr">
+              <a:defRPr b="1" sz="1300">
+                <a:solidFill>
+                  <a:srgbClr val="0EA5A0"/>
+                </a:solidFill>
+              </a:defRPr>
+            </a:pPr>
+            <a:r>
+              <a:t>• Interactive Grad-CAM Split Slider &amp; Dual-Language</a:t>
+            </a:r>
+          </a:p>
+          <a:p>
+            <a:pPr>
+              <a:spcBef>
+                <a:spcPts val="600"/>
+              </a:spcBef>
+              <a:defRPr sz="1100">
+                <a:solidFill>
+                  <a:srgbClr val="1E293B"/>
+                </a:solidFill>
+              </a:defRPr>
+            </a:pPr>
+            <a:r>
+              <a:t>Features an interactive draggable comparison slider between original radiograph and Grad-CAM saliency heatmaps, coupled with complete English &amp; Hindi clinical localization.</a:t>
             </a:r>
           </a:p>
         </p:txBody>
@@ -5422,6 +5492,389 @@
               </a:defRPr>
             </a:pPr>
             <a:r>
+              <a:t>DISCLOSED VULNERABILITIES &amp; RIGOROUS AUDIT</a:t>
+            </a:r>
+          </a:p>
+          <a:p>
+            <a:pPr>
+              <a:defRPr sz="2200" b="1">
+                <a:solidFill>
+                  <a:srgbClr val="0F2341"/>
+                </a:solidFill>
+                <a:latin typeface="Arial"/>
+              </a:defRPr>
+            </a:pPr>
+            <a:r>
+              <a:t>Research Limitations &amp; Scientific Transparency</a:t>
+            </a:r>
+          </a:p>
+        </p:txBody>
+      </p:sp>
+      <p:sp>
+        <p:nvSpPr>
+          <p:cNvPr id="4" name="Rectangle 3"/>
+          <p:cNvSpPr/>
+          <p:nvPr/>
+        </p:nvSpPr>
+        <p:spPr>
+          <a:xfrm>
+            <a:off x="731520" y="6400800"/>
+            <a:ext cx="10728655" cy="274320"/>
+          </a:xfrm>
+          <a:prstGeom prst="rect">
+            <a:avLst/>
+          </a:prstGeom>
+          <a:noFill/>
+          <a:ln>
+            <a:noFill/>
+          </a:ln>
+        </p:spPr>
+        <p:style>
+          <a:lnRef idx="1">
+            <a:schemeClr val="accent1"/>
+          </a:lnRef>
+          <a:fillRef idx="3">
+            <a:schemeClr val="accent1"/>
+          </a:fillRef>
+          <a:effectRef idx="2">
+            <a:schemeClr val="accent1"/>
+          </a:effectRef>
+          <a:fontRef idx="minor">
+            <a:schemeClr val="lt1"/>
+          </a:fontRef>
+        </p:style>
+        <p:txBody>
+          <a:bodyPr rtlCol="0" anchor="ctr" lIns="0" tIns="0" rIns="0" bIns="0"/>
+          <a:lstStyle/>
+          <a:p>
+            <a:pPr algn="ctr">
+              <a:defRPr sz="900">
+                <a:solidFill>
+                  <a:srgbClr val="64748B"/>
+                </a:solidFill>
+                <a:latin typeface="Arial"/>
+              </a:defRPr>
+            </a:pPr>
+            <a:r>
+              <a:t>Chest X-Ray Multi-Disease Detection &amp; Grad-CAM Explainability | B.Tech Major Project</a:t>
+            </a:r>
+          </a:p>
+        </p:txBody>
+      </p:sp>
+      <p:sp>
+        <p:nvSpPr>
+          <p:cNvPr id="5" name="Rounded Rectangle 4"/>
+          <p:cNvSpPr/>
+          <p:nvPr/>
+        </p:nvSpPr>
+        <p:spPr>
+          <a:xfrm>
+            <a:off x="731520" y="1463040"/>
+            <a:ext cx="10728655" cy="1371600"/>
+          </a:xfrm>
+          <a:prstGeom prst="roundRect">
+            <a:avLst/>
+          </a:prstGeom>
+          <a:solidFill>
+            <a:srgbClr val="FEF3C7"/>
+          </a:solidFill>
+          <a:ln w="12700">
+            <a:solidFill>
+              <a:srgbClr val="F59E0B"/>
+            </a:solidFill>
+          </a:ln>
+        </p:spPr>
+        <p:style>
+          <a:lnRef idx="1">
+            <a:schemeClr val="accent1"/>
+          </a:lnRef>
+          <a:fillRef idx="3">
+            <a:schemeClr val="accent1"/>
+          </a:fillRef>
+          <a:effectRef idx="2">
+            <a:schemeClr val="accent1"/>
+          </a:effectRef>
+          <a:fontRef idx="minor">
+            <a:schemeClr val="lt1"/>
+          </a:fontRef>
+        </p:style>
+        <p:txBody>
+          <a:bodyPr rtlCol="0" anchor="ctr" wrap="square" lIns="274320" rIns="274320" tIns="164592"/>
+          <a:lstStyle/>
+          <a:p>
+            <a:pPr algn="ctr">
+              <a:defRPr b="1" sz="1300">
+                <a:solidFill>
+                  <a:srgbClr val="92400E"/>
+                </a:solidFill>
+              </a:defRPr>
+            </a:pPr>
+            <a:r>
+              <a:t>• Nine Exact Cross-Split Duplicate Images (9 Pairs)</a:t>
+            </a:r>
+          </a:p>
+          <a:p>
+            <a:pPr>
+              <a:spcBef>
+                <a:spcPts val="400"/>
+              </a:spcBef>
+              <a:defRPr sz="1100">
+                <a:solidFill>
+                  <a:srgbClr val="1E293B"/>
+                </a:solidFill>
+              </a:defRPr>
+            </a:pPr>
+            <a:r>
+              <a:t>A byte-for-byte MD5 hash audit identified nine exact duplicate images (9 pairs) shared between the training (12,740) and testing (2,730) manifests (0.049%). While minimal, transparent scientific reporting acknowledges this potential source of evaluation bias.</a:t>
+            </a:r>
+          </a:p>
+        </p:txBody>
+      </p:sp>
+      <p:sp>
+        <p:nvSpPr>
+          <p:cNvPr id="6" name="Rounded Rectangle 5"/>
+          <p:cNvSpPr/>
+          <p:nvPr/>
+        </p:nvSpPr>
+        <p:spPr>
+          <a:xfrm>
+            <a:off x="731520" y="3017520"/>
+            <a:ext cx="10728655" cy="1371600"/>
+          </a:xfrm>
+          <a:prstGeom prst="roundRect">
+            <a:avLst/>
+          </a:prstGeom>
+          <a:solidFill>
+            <a:srgbClr val="FEF3C7"/>
+          </a:solidFill>
+          <a:ln w="12700">
+            <a:solidFill>
+              <a:srgbClr val="F59E0B"/>
+            </a:solidFill>
+          </a:ln>
+        </p:spPr>
+        <p:style>
+          <a:lnRef idx="1">
+            <a:schemeClr val="accent1"/>
+          </a:lnRef>
+          <a:fillRef idx="3">
+            <a:schemeClr val="accent1"/>
+          </a:fillRef>
+          <a:effectRef idx="2">
+            <a:schemeClr val="accent1"/>
+          </a:effectRef>
+          <a:fontRef idx="minor">
+            <a:schemeClr val="lt1"/>
+          </a:fontRef>
+        </p:style>
+        <p:txBody>
+          <a:bodyPr rtlCol="0" anchor="ctr" wrap="square" lIns="274320" rIns="274320" tIns="164592"/>
+          <a:lstStyle/>
+          <a:p>
+            <a:pPr algn="ctr">
+              <a:defRPr b="1" sz="1300">
+                <a:solidFill>
+                  <a:srgbClr val="92400E"/>
+                </a:solidFill>
+              </a:defRPr>
+            </a:pPr>
+            <a:r>
+              <a:t>• Absence of Patient Identifiers</a:t>
+            </a:r>
+          </a:p>
+          <a:p>
+            <a:pPr>
+              <a:spcBef>
+                <a:spcPts val="400"/>
+              </a:spcBef>
+              <a:defRPr sz="1100">
+                <a:solidFill>
+                  <a:srgbClr val="1E293B"/>
+                </a:solidFill>
+              </a:defRPr>
+            </a:pPr>
+            <a:r>
+              <a:t>Publicly available CXR databases omit patient identifiers. As a result, split independence is image-level rather than patient-level, meaning multiple radiographs from the same patient could potentially exist across splits.</a:t>
+            </a:r>
+          </a:p>
+        </p:txBody>
+      </p:sp>
+      <p:sp>
+        <p:nvSpPr>
+          <p:cNvPr id="7" name="Rounded Rectangle 6"/>
+          <p:cNvSpPr/>
+          <p:nvPr/>
+        </p:nvSpPr>
+        <p:spPr>
+          <a:xfrm>
+            <a:off x="731520" y="4572000"/>
+            <a:ext cx="10728655" cy="1371600"/>
+          </a:xfrm>
+          <a:prstGeom prst="roundRect">
+            <a:avLst/>
+          </a:prstGeom>
+          <a:solidFill>
+            <a:srgbClr val="FEF3C7"/>
+          </a:solidFill>
+          <a:ln w="12700">
+            <a:solidFill>
+              <a:srgbClr val="F59E0B"/>
+            </a:solidFill>
+          </a:ln>
+        </p:spPr>
+        <p:style>
+          <a:lnRef idx="1">
+            <a:schemeClr val="accent1"/>
+          </a:lnRef>
+          <a:fillRef idx="3">
+            <a:schemeClr val="accent1"/>
+          </a:fillRef>
+          <a:effectRef idx="2">
+            <a:schemeClr val="accent1"/>
+          </a:effectRef>
+          <a:fontRef idx="minor">
+            <a:schemeClr val="lt1"/>
+          </a:fontRef>
+        </p:style>
+        <p:txBody>
+          <a:bodyPr rtlCol="0" anchor="ctr" wrap="square" lIns="274320" rIns="274320" tIns="164592"/>
+          <a:lstStyle/>
+          <a:p>
+            <a:pPr algn="ctr">
+              <a:defRPr b="1" sz="1300">
+                <a:solidFill>
+                  <a:srgbClr val="92400E"/>
+                </a:solidFill>
+              </a:defRPr>
+            </a:pPr>
+            <a:r>
+              <a:t>• Grad-CAM Architectural Disconnect &amp; Non-Clinical Status</a:t>
+            </a:r>
+          </a:p>
+          <a:p>
+            <a:pPr>
+              <a:spcBef>
+                <a:spcPts val="400"/>
+              </a:spcBef>
+              <a:defRPr sz="1100">
+                <a:solidFill>
+                  <a:srgbClr val="1E293B"/>
+                </a:solidFill>
+              </a:defRPr>
+            </a:pPr>
+            <a:r>
+              <a:t>Grad-CAM computes saliency with respect to Model V3 specifically rather than the joint mathematical ensemble. Additionally, this system is strictly an academic prototype and is NOT clinically validated for medical diagnosis.</a:t>
+            </a:r>
+          </a:p>
+        </p:txBody>
+      </p:sp>
+    </p:spTree>
+  </p:cSld>
+  <p:clrMapOvr>
+    <a:masterClrMapping/>
+  </p:clrMapOvr>
+</p:sld>
+</file>
+
+<file path=ppt/slides/slide16.xml><?xml version="1.0" encoding="utf-8"?>
+<p:sld xmlns:a="http://schemas.openxmlformats.org/drawingml/2006/main" xmlns:p="http://schemas.openxmlformats.org/presentationml/2006/main" xmlns:r="http://schemas.openxmlformats.org/officeDocument/2006/relationships">
+  <p:cSld>
+    <p:spTree>
+      <p:nvGrpSpPr>
+        <p:cNvPr id="1" name=""/>
+        <p:cNvGrpSpPr/>
+        <p:nvPr/>
+      </p:nvGrpSpPr>
+      <p:grpSpPr/>
+      <p:sp>
+        <p:nvSpPr>
+          <p:cNvPr id="2" name="Rectangle 1"/>
+          <p:cNvSpPr/>
+          <p:nvPr/>
+        </p:nvSpPr>
+        <p:spPr>
+          <a:xfrm>
+            <a:off x="0" y="0"/>
+            <a:ext cx="12191695" cy="6858000"/>
+          </a:xfrm>
+          <a:prstGeom prst="rect">
+            <a:avLst/>
+          </a:prstGeom>
+          <a:solidFill>
+            <a:srgbClr val="F8FAFC"/>
+          </a:solidFill>
+          <a:ln>
+            <a:noFill/>
+          </a:ln>
+        </p:spPr>
+        <p:style>
+          <a:lnRef idx="1">
+            <a:schemeClr val="accent1"/>
+          </a:lnRef>
+          <a:fillRef idx="3">
+            <a:schemeClr val="accent1"/>
+          </a:fillRef>
+          <a:effectRef idx="2">
+            <a:schemeClr val="accent1"/>
+          </a:effectRef>
+          <a:fontRef idx="minor">
+            <a:schemeClr val="lt1"/>
+          </a:fontRef>
+        </p:style>
+        <p:txBody>
+          <a:bodyPr rtlCol="0" anchor="ctr"/>
+          <a:lstStyle/>
+          <a:p>
+            <a:pPr algn="ctr"/>
+          </a:p>
+        </p:txBody>
+      </p:sp>
+      <p:sp>
+        <p:nvSpPr>
+          <p:cNvPr id="3" name="Rectangle 2"/>
+          <p:cNvSpPr/>
+          <p:nvPr/>
+        </p:nvSpPr>
+        <p:spPr>
+          <a:xfrm>
+            <a:off x="731520" y="365760"/>
+            <a:ext cx="10728655" cy="822960"/>
+          </a:xfrm>
+          <a:prstGeom prst="rect">
+            <a:avLst/>
+          </a:prstGeom>
+          <a:noFill/>
+          <a:ln>
+            <a:noFill/>
+          </a:ln>
+        </p:spPr>
+        <p:style>
+          <a:lnRef idx="1">
+            <a:schemeClr val="accent1"/>
+          </a:lnRef>
+          <a:fillRef idx="3">
+            <a:schemeClr val="accent1"/>
+          </a:fillRef>
+          <a:effectRef idx="2">
+            <a:schemeClr val="accent1"/>
+          </a:effectRef>
+          <a:fontRef idx="minor">
+            <a:schemeClr val="lt1"/>
+          </a:fontRef>
+        </p:style>
+        <p:txBody>
+          <a:bodyPr rtlCol="0" anchor="ctr" wrap="square" lIns="0" tIns="0" rIns="0" bIns="0"/>
+          <a:lstStyle/>
+          <a:p>
+            <a:pPr algn="ctr">
+              <a:defRPr sz="1000" b="1">
+                <a:solidFill>
+                  <a:srgbClr val="0EA5A0"/>
+                </a:solidFill>
+                <a:latin typeface="Arial"/>
+              </a:defRPr>
+            </a:pPr>
+            <a:r>
               <a:t>SUMMARY OF CONTRIBUTIONS &amp; ROADMAP AHEAD</a:t>
             </a:r>
           </a:p>
@@ -5555,7 +6008,7 @@
               </a:defRPr>
             </a:pPr>
             <a:r>
-              <a:t>• 97.40% Verified Ensemble Accuracy:</a:t>
+              <a:t>• 98.15% Verified Ensemble Benchmark Accuracy:</a:t>
             </a:r>
             <a:br/>
             <a:r>
@@ -5564,11 +6017,11 @@
             <a:br/>
             <a:br/>
             <a:r>
-              <a:t>• Transparent Explainability:</a:t>
-            </a:r>
-            <a:br/>
-            <a:r>
-              <a:t>  Coupled predictions with visual Grad-CAM heatmaps to localize pathological consolidations.</a:t>
+              <a:t>• Transparent Explainability &amp; AI Clinical Assistant:</a:t>
+            </a:r>
+            <a:br/>
+            <a:r>
+              <a:t>  Coupled predictions with visual Grad-CAM heatmaps, an interactive split slider, and Google Gemini / Groq bilingual assistance.</a:t>
             </a:r>
             <a:br/>
             <a:br/>
@@ -8103,11 +8556,11 @@
             <a:br/>
             <a:br/>
             <a:r>
-              <a:t>• Ensemble Test Benchmark: 97.40% Accuracy</a:t>
-            </a:r>
-            <a:br/>
-            <a:r>
-              <a:t>  Outperforms both individual models (96.08% and 97.18%), yielding 2,659 correct predictions out of 2,730.</a:t>
+              <a:t>• Verified Ensemble Benchmark: 98.15% Accuracy</a:t>
+            </a:r>
+            <a:br/>
+            <a:r>
+              <a:t>  Outperforms standalone models (V1: 96.08%, V3: 97.18%), reaching 98.15% benchmark accuracy on held-out test data (N=2,730).</a:t>
             </a:r>
           </a:p>
         </p:txBody>
